--- a/RedBus_Clone_Presentation.pptx
+++ b/RedBus_Clone_Presentation.pptx
@@ -30743,41 +30743,6 @@
           </a:p>
         </p:txBody>
       </p:sp>
-      <p:pic>
-        <p:nvPicPr>
-          <p:cNvPr id="4" name="Picture 3">
-            <a:extLst>
-              <a:ext uri="{FF2B5EF4-FFF2-40B4-BE49-F238E27FC236}">
-                <a16:creationId xmlns:a16="http://schemas.microsoft.com/office/drawing/2014/main" id="{09D97FD6-A665-B2C8-96D2-2FEF2679AABA}"/>
-              </a:ext>
-            </a:extLst>
-          </p:cNvPr>
-          <p:cNvPicPr>
-            <a:picLocks noChangeAspect="1"/>
-          </p:cNvPicPr>
-          <p:nvPr userDrawn="1"/>
-        </p:nvPicPr>
-        <p:blipFill>
-          <a:blip r:embed="rId2" cstate="screen">
-            <a:extLst>
-              <a:ext uri="{28A0092B-C50C-407E-A947-70E740481C1C}">
-                <a14:useLocalDpi xmlns:a14="http://schemas.microsoft.com/office/drawing/2010/main"/>
-              </a:ext>
-            </a:extLst>
-          </a:blip>
-          <a:srcRect/>
-          <a:stretch/>
-        </p:blipFill>
-        <p:spPr>
-          <a:xfrm>
-            <a:off x="113617" y="-5031"/>
-            <a:ext cx="2777922" cy="1307351"/>
-          </a:xfrm>
-          <a:prstGeom prst="rect">
-            <a:avLst/>
-          </a:prstGeom>
-        </p:spPr>
-      </p:pic>
     </p:spTree>
     <p:extLst>
       <p:ext uri="{BB962C8B-B14F-4D97-AF65-F5344CB8AC3E}">
@@ -31324,66 +31289,6 @@
           <a:chExt cx="0" cy="0"/>
         </a:xfrm>
       </p:grpSpPr>
-      <p:graphicFrame>
-        <p:nvGraphicFramePr>
-          <p:cNvPr id="4" name="Object 3" hidden="1"/>
-          <p:cNvGraphicFramePr>
-            <a:graphicFrameLocks noChangeAspect="1"/>
-          </p:cNvGraphicFramePr>
-          <p:nvPr>
-            <p:custDataLst>
-              <p:tags r:id="rId59"/>
-            </p:custDataLst>
-            <p:extLst>
-              <p:ext uri="{D42A27DB-BD31-4B8C-83A1-F6EECF244321}">
-                <p14:modId xmlns:p14="http://schemas.microsoft.com/office/powerpoint/2010/main" val="2630452337"/>
-              </p:ext>
-            </p:extLst>
-          </p:nvPr>
-        </p:nvGraphicFramePr>
-        <p:xfrm>
-          <a:off x="2119" y="1591"/>
-          <a:ext cx="2116" cy="1587"/>
-        </p:xfrm>
-        <a:graphic>
-          <a:graphicData uri="http://schemas.openxmlformats.org/presentationml/2006/ole">
-            <mc:AlternateContent xmlns:mc="http://schemas.openxmlformats.org/markup-compatibility/2006">
-              <mc:Choice xmlns:v="urn:schemas-microsoft-com:vml" Requires="v">
-                <p:oleObj name="think-cell Slide" r:id="rId60" imgW="270" imgH="270" progId="TCLayout.ActiveDocument.1">
-                  <p:embed/>
-                </p:oleObj>
-              </mc:Choice>
-              <mc:Fallback>
-                <p:oleObj name="think-cell Slide" r:id="rId60" imgW="270" imgH="270" progId="TCLayout.ActiveDocument.1">
-                  <p:embed/>
-                  <p:pic>
-                    <p:nvPicPr>
-                      <p:cNvPr id="4" name="Object 3" hidden="1"/>
-                      <p:cNvPicPr/>
-                      <p:nvPr/>
-                    </p:nvPicPr>
-                    <p:blipFill>
-                      <a:blip r:embed="rId61"/>
-                      <a:stretch>
-                        <a:fillRect/>
-                      </a:stretch>
-                    </p:blipFill>
-                    <p:spPr>
-                      <a:xfrm>
-                        <a:off x="2119" y="1591"/>
-                        <a:ext cx="2116" cy="1587"/>
-                      </a:xfrm>
-                      <a:prstGeom prst="rect">
-                        <a:avLst/>
-                      </a:prstGeom>
-                    </p:spPr>
-                  </p:pic>
-                </p:oleObj>
-              </mc:Fallback>
-            </mc:AlternateContent>
-          </a:graphicData>
-        </a:graphic>
-      </p:graphicFrame>
       <p:sp>
         <p:nvSpPr>
           <p:cNvPr id="2" name="Title Placeholder 1"/>
@@ -31414,130 +31319,6 @@
               <a:t>Click to edit Master title style</a:t>
             </a:r>
             <a:endParaRPr lang="en-US" noProof="0" dirty="0"/>
-          </a:p>
-        </p:txBody>
-      </p:sp>
-      <p:sp>
-        <p:nvSpPr>
-          <p:cNvPr id="15" name="CaseCode"/>
-          <p:cNvSpPr txBox="1"/>
-          <p:nvPr/>
-        </p:nvSpPr>
-        <p:spPr>
-          <a:xfrm>
-            <a:off x="6335184" y="6519672"/>
-            <a:ext cx="4896560" cy="246221"/>
-          </a:xfrm>
-          <a:prstGeom prst="rect">
-            <a:avLst/>
-          </a:prstGeom>
-          <a:noFill/>
-        </p:spPr>
-        <p:txBody>
-          <a:bodyPr wrap="square" lIns="0" tIns="0" rIns="0" bIns="0" rtlCol="0">
-            <a:spAutoFit/>
-          </a:bodyPr>
-          <a:lstStyle/>
-          <a:p>
-            <a:pPr marL="0" indent="0" algn="r">
-              <a:spcBef>
-                <a:spcPts val="0"/>
-              </a:spcBef>
-              <a:buSzPct val="100000"/>
-              <a:buFont typeface="Arial"/>
-              <a:buNone/>
-            </a:pPr>
-            <a:r>
-              <a:rPr lang="en-US" sz="800" noProof="0" dirty="0">
-                <a:solidFill>
-                  <a:srgbClr val="75787B"/>
-                </a:solidFill>
-                <a:latin typeface="Aptos" panose="020B0004020202020204" pitchFamily="34" charset="0"/>
-                <a:cs typeface="Calibri" panose="020F0502020204030204" pitchFamily="34" charset="0"/>
-              </a:rPr>
-              <a:t>Presentation title</a:t>
-            </a:r>
-            <a:br>
-              <a:rPr lang="en-US" sz="800" noProof="0" dirty="0">
-                <a:solidFill>
-                  <a:srgbClr val="75787B"/>
-                </a:solidFill>
-                <a:latin typeface="Aptos" panose="020B0004020202020204" pitchFamily="34" charset="0"/>
-                <a:cs typeface="Calibri" panose="020F0502020204030204" pitchFamily="34" charset="0"/>
-              </a:rPr>
-            </a:br>
-            <a:r>
-              <a:rPr lang="en-US" sz="800" noProof="0" dirty="0">
-                <a:solidFill>
-                  <a:srgbClr val="75787B"/>
-                </a:solidFill>
-                <a:latin typeface="Aptos" panose="020B0004020202020204" pitchFamily="34" charset="0"/>
-                <a:cs typeface="Calibri" panose="020F0502020204030204" pitchFamily="34" charset="0"/>
-              </a:rPr>
-              <a:t>[To edit, click View &gt; Slide Master &gt; Slide Master]</a:t>
-            </a:r>
-          </a:p>
-        </p:txBody>
-      </p:sp>
-      <p:sp>
-        <p:nvSpPr>
-          <p:cNvPr id="18" name="Copyright"/>
-          <p:cNvSpPr txBox="1"/>
-          <p:nvPr/>
-        </p:nvSpPr>
-        <p:spPr>
-          <a:xfrm>
-            <a:off x="457200" y="6519672"/>
-            <a:ext cx="5355168" cy="246221"/>
-          </a:xfrm>
-          <a:prstGeom prst="rect">
-            <a:avLst/>
-          </a:prstGeom>
-          <a:noFill/>
-        </p:spPr>
-        <p:txBody>
-          <a:bodyPr wrap="square" lIns="0" tIns="0" rIns="0" bIns="0" rtlCol="0">
-            <a:spAutoFit/>
-          </a:bodyPr>
-          <a:lstStyle/>
-          <a:p>
-            <a:pPr marL="0" indent="0">
-              <a:spcBef>
-                <a:spcPts val="450"/>
-              </a:spcBef>
-              <a:buSzPct val="100000"/>
-              <a:buFont typeface="Arial"/>
-              <a:buNone/>
-            </a:pPr>
-            <a:r>
-              <a:rPr lang="en-US" sz="800" noProof="0" dirty="0">
-                <a:solidFill>
-                  <a:srgbClr val="75787B"/>
-                </a:solidFill>
-                <a:latin typeface="Aptos" panose="020B0004020202020204" pitchFamily="34" charset="0"/>
-                <a:cs typeface="Calibri" panose="020F0502020204030204" pitchFamily="34" charset="0"/>
-              </a:rPr>
-              <a:t>Member firms and DTTL: Insert appropriate copyright</a:t>
-            </a:r>
-            <a:br>
-              <a:rPr lang="en-US" sz="800" noProof="0" dirty="0">
-                <a:solidFill>
-                  <a:srgbClr val="75787B"/>
-                </a:solidFill>
-                <a:latin typeface="Aptos" panose="020B0004020202020204" pitchFamily="34" charset="0"/>
-                <a:cs typeface="Calibri" panose="020F0502020204030204" pitchFamily="34" charset="0"/>
-              </a:rPr>
-            </a:br>
-            <a:r>
-              <a:rPr lang="en-US" sz="800" noProof="0" dirty="0">
-                <a:solidFill>
-                  <a:srgbClr val="75787B"/>
-                </a:solidFill>
-                <a:latin typeface="Aptos" panose="020B0004020202020204" pitchFamily="34" charset="0"/>
-                <a:cs typeface="Calibri" panose="020F0502020204030204" pitchFamily="34" charset="0"/>
-              </a:rPr>
-              <a:t>[To edit, click View &gt; Slide Master &gt; Slide Master]</a:t>
-            </a:r>
           </a:p>
         </p:txBody>
       </p:sp>
@@ -32368,7 +32149,7 @@
             <a:avLst/>
           </a:prstGeom>
           <a:solidFill>
-            <a:srgbClr val="86BC25"/>
+            <a:srgbClr val="3B82F6"/>
           </a:solidFill>
           <a:ln>
             <a:noFill/>
@@ -32423,7 +32204,7 @@
             <a:r>
               <a:rPr sz="1000" b="1" i="0">
                 <a:solidFill>
-                  <a:srgbClr val="046A38"/>
+                  <a:srgbClr val="1E3A8A"/>
                 </a:solidFill>
                 <a:latin typeface="Aptos"/>
               </a:rPr>
@@ -32482,7 +32263,7 @@
             <a:avLst/>
           </a:prstGeom>
           <a:solidFill>
-            <a:srgbClr val="86BC25"/>
+            <a:srgbClr val="3B82F6"/>
           </a:solidFill>
           <a:ln>
             <a:noFill/>
@@ -32537,7 +32318,7 @@
             <a:r>
               <a:rPr sz="1000" b="1" i="0">
                 <a:solidFill>
-                  <a:srgbClr val="046A38"/>
+                  <a:srgbClr val="1E3A8A"/>
                 </a:solidFill>
                 <a:latin typeface="Aptos"/>
               </a:rPr>
@@ -32596,7 +32377,7 @@
             <a:avLst/>
           </a:prstGeom>
           <a:solidFill>
-            <a:srgbClr val="86BC25"/>
+            <a:srgbClr val="3B82F6"/>
           </a:solidFill>
           <a:ln>
             <a:noFill/>
@@ -32651,7 +32432,7 @@
             <a:r>
               <a:rPr sz="1000" b="1" i="0">
                 <a:solidFill>
-                  <a:srgbClr val="046A38"/>
+                  <a:srgbClr val="1E3A8A"/>
                 </a:solidFill>
                 <a:latin typeface="Aptos"/>
               </a:rPr>
@@ -32728,7 +32509,7 @@
             <a:avLst/>
           </a:prstGeom>
           <a:solidFill>
-            <a:srgbClr val="86BC25"/>
+            <a:srgbClr val="3B82F6"/>
           </a:solidFill>
           <a:ln>
             <a:noFill/>
@@ -32783,7 +32564,7 @@
             <a:r>
               <a:rPr sz="1000" b="1" i="0">
                 <a:solidFill>
-                  <a:srgbClr val="046A38"/>
+                  <a:srgbClr val="1E3A8A"/>
                 </a:solidFill>
                 <a:latin typeface="Aptos"/>
               </a:rPr>
@@ -32842,7 +32623,7 @@
             <a:avLst/>
           </a:prstGeom>
           <a:solidFill>
-            <a:srgbClr val="1C3D26"/>
+            <a:srgbClr val="172554"/>
           </a:solidFill>
           <a:ln>
             <a:noFill/>
@@ -33378,7 +33159,7 @@
             <a:avLst/>
           </a:prstGeom>
           <a:solidFill>
-            <a:srgbClr val="86BC25"/>
+            <a:srgbClr val="3B82F6"/>
           </a:solidFill>
           <a:ln>
             <a:noFill/>
@@ -33457,7 +33238,7 @@
             <a:avLst/>
           </a:prstGeom>
           <a:solidFill>
-            <a:srgbClr val="86BC25"/>
+            <a:srgbClr val="3B82F6"/>
           </a:solidFill>
           <a:ln>
             <a:noFill/>
@@ -33536,7 +33317,7 @@
             <a:avLst/>
           </a:prstGeom>
           <a:solidFill>
-            <a:srgbClr val="86BC25"/>
+            <a:srgbClr val="3B82F6"/>
           </a:solidFill>
           <a:ln>
             <a:noFill/>
@@ -33615,7 +33396,7 @@
             <a:avLst/>
           </a:prstGeom>
           <a:solidFill>
-            <a:srgbClr val="86BC25"/>
+            <a:srgbClr val="3B82F6"/>
           </a:solidFill>
           <a:ln>
             <a:noFill/>
@@ -33694,7 +33475,7 @@
             <a:avLst/>
           </a:prstGeom>
           <a:solidFill>
-            <a:srgbClr val="86BC25"/>
+            <a:srgbClr val="3B82F6"/>
           </a:solidFill>
           <a:ln>
             <a:noFill/>
@@ -33857,7 +33638,7 @@
             <a:avLst/>
           </a:prstGeom>
           <a:solidFill>
-            <a:srgbClr val="86BC25"/>
+            <a:srgbClr val="3B82F6"/>
           </a:solidFill>
           <a:ln>
             <a:noFill/>
@@ -34079,7 +33860,7 @@
             <a:avLst/>
           </a:prstGeom>
           <a:solidFill>
-            <a:srgbClr val="0D8390"/>
+            <a:srgbClr val="7C3AED"/>
           </a:solidFill>
           <a:ln>
             <a:noFill/>
@@ -34292,7 +34073,7 @@
             <a:avLst/>
           </a:prstGeom>
           <a:solidFill>
-            <a:srgbClr val="26890D"/>
+            <a:srgbClr val="1D4ED8"/>
           </a:solidFill>
           <a:ln>
             <a:noFill/>
@@ -34532,7 +34313,7 @@
             <a:avLst/>
           </a:prstGeom>
           <a:solidFill>
-            <a:srgbClr val="005587"/>
+            <a:srgbClr val="312E81"/>
           </a:solidFill>
           <a:ln>
             <a:noFill/>
@@ -34746,7 +34527,7 @@
             <a:avLst/>
           </a:prstGeom>
           <a:solidFill>
-            <a:srgbClr val="86BC25"/>
+            <a:srgbClr val="3B82F6"/>
           </a:solidFill>
           <a:ln>
             <a:noFill/>
@@ -34825,7 +34606,7 @@
             <a:avLst/>
           </a:prstGeom>
           <a:solidFill>
-            <a:srgbClr val="86BC25"/>
+            <a:srgbClr val="3B82F6"/>
           </a:solidFill>
           <a:ln>
             <a:noFill/>
@@ -34985,7 +34766,7 @@
             <a:avLst/>
           </a:prstGeom>
           <a:solidFill>
-            <a:srgbClr val="0D8390"/>
+            <a:srgbClr val="7C3AED"/>
           </a:solidFill>
           <a:ln>
             <a:noFill/>
@@ -35163,7 +34944,7 @@
             <a:avLst/>
           </a:prstGeom>
           <a:solidFill>
-            <a:srgbClr val="005587"/>
+            <a:srgbClr val="312E81"/>
           </a:solidFill>
           <a:ln>
             <a:noFill/>
@@ -35431,7 +35212,7 @@
             <a:avLst/>
           </a:prstGeom>
           <a:solidFill>
-            <a:srgbClr val="86BC25"/>
+            <a:srgbClr val="3B82F6"/>
           </a:solidFill>
           <a:ln>
             <a:noFill/>
@@ -35494,7 +35275,7 @@
             <a:r>
               <a:rPr sz="1100" b="1" i="0">
                 <a:solidFill>
-                  <a:srgbClr val="86BC25"/>
+                  <a:srgbClr val="3B82F6"/>
                 </a:solidFill>
                 <a:latin typeface="Aptos"/>
               </a:rPr>
@@ -35565,7 +35346,7 @@
             <a:avLst/>
           </a:prstGeom>
           <a:solidFill>
-            <a:srgbClr val="86BC25"/>
+            <a:srgbClr val="3B82F6"/>
           </a:solidFill>
           <a:ln>
             <a:noFill/>
@@ -35644,7 +35425,7 @@
             <a:avLst/>
           </a:prstGeom>
           <a:solidFill>
-            <a:srgbClr val="86BC25"/>
+            <a:srgbClr val="3B82F6"/>
           </a:solidFill>
           <a:ln>
             <a:noFill/>
@@ -35741,7 +35522,7 @@
             <a:avLst/>
           </a:prstGeom>
           <a:solidFill>
-            <a:srgbClr val="86BC25"/>
+            <a:srgbClr val="3B82F6"/>
           </a:solidFill>
           <a:ln>
             <a:noFill/>
@@ -35838,7 +35619,7 @@
             <a:avLst/>
           </a:prstGeom>
           <a:solidFill>
-            <a:srgbClr val="86BC25"/>
+            <a:srgbClr val="3B82F6"/>
           </a:solidFill>
           <a:ln>
             <a:noFill/>
@@ -35917,7 +35698,7 @@
             <a:avLst/>
           </a:prstGeom>
           <a:solidFill>
-            <a:srgbClr val="0D8390"/>
+            <a:srgbClr val="7C3AED"/>
           </a:solidFill>
           <a:ln>
             <a:noFill/>
@@ -35980,7 +35761,7 @@
             <a:r>
               <a:rPr sz="1100" b="1" i="0">
                 <a:solidFill>
-                  <a:srgbClr val="0D8390"/>
+                  <a:srgbClr val="7C3AED"/>
                 </a:solidFill>
                 <a:latin typeface="Aptos"/>
               </a:rPr>
@@ -36051,7 +35832,7 @@
             <a:avLst/>
           </a:prstGeom>
           <a:solidFill>
-            <a:srgbClr val="0D8390"/>
+            <a:srgbClr val="7C3AED"/>
           </a:solidFill>
           <a:ln>
             <a:noFill/>
@@ -36130,7 +35911,7 @@
             <a:avLst/>
           </a:prstGeom>
           <a:solidFill>
-            <a:srgbClr val="0D8390"/>
+            <a:srgbClr val="7C3AED"/>
           </a:solidFill>
           <a:ln>
             <a:noFill/>
@@ -36209,7 +35990,7 @@
             <a:avLst/>
           </a:prstGeom>
           <a:solidFill>
-            <a:srgbClr val="0D8390"/>
+            <a:srgbClr val="7C3AED"/>
           </a:solidFill>
           <a:ln>
             <a:noFill/>
@@ -36288,7 +36069,7 @@
             <a:avLst/>
           </a:prstGeom>
           <a:solidFill>
-            <a:srgbClr val="0D8390"/>
+            <a:srgbClr val="7C3AED"/>
           </a:solidFill>
           <a:ln>
             <a:noFill/>
@@ -36367,7 +36148,7 @@
             <a:avLst/>
           </a:prstGeom>
           <a:solidFill>
-            <a:srgbClr val="26890D"/>
+            <a:srgbClr val="1D4ED8"/>
           </a:solidFill>
           <a:ln>
             <a:noFill/>
@@ -36430,7 +36211,7 @@
             <a:r>
               <a:rPr sz="1100" b="1" i="0">
                 <a:solidFill>
-                  <a:srgbClr val="26890D"/>
+                  <a:srgbClr val="1D4ED8"/>
                 </a:solidFill>
                 <a:latin typeface="Aptos"/>
               </a:rPr>
@@ -36501,7 +36282,7 @@
             <a:avLst/>
           </a:prstGeom>
           <a:solidFill>
-            <a:srgbClr val="26890D"/>
+            <a:srgbClr val="1D4ED8"/>
           </a:solidFill>
           <a:ln>
             <a:noFill/>
@@ -36598,7 +36379,7 @@
             <a:avLst/>
           </a:prstGeom>
           <a:solidFill>
-            <a:srgbClr val="26890D"/>
+            <a:srgbClr val="1D4ED8"/>
           </a:solidFill>
           <a:ln>
             <a:noFill/>
@@ -36677,7 +36458,7 @@
             <a:avLst/>
           </a:prstGeom>
           <a:solidFill>
-            <a:srgbClr val="26890D"/>
+            <a:srgbClr val="1D4ED8"/>
           </a:solidFill>
           <a:ln>
             <a:noFill/>
@@ -36756,7 +36537,7 @@
             <a:avLst/>
           </a:prstGeom>
           <a:solidFill>
-            <a:srgbClr val="26890D"/>
+            <a:srgbClr val="1D4ED8"/>
           </a:solidFill>
           <a:ln>
             <a:noFill/>
@@ -36835,7 +36616,7 @@
             <a:avLst/>
           </a:prstGeom>
           <a:solidFill>
-            <a:srgbClr val="005587"/>
+            <a:srgbClr val="312E81"/>
           </a:solidFill>
           <a:ln>
             <a:noFill/>
@@ -36898,7 +36679,7 @@
             <a:r>
               <a:rPr sz="1100" b="1" i="0">
                 <a:solidFill>
-                  <a:srgbClr val="005587"/>
+                  <a:srgbClr val="312E81"/>
                 </a:solidFill>
                 <a:latin typeface="Aptos"/>
               </a:rPr>
@@ -36969,7 +36750,7 @@
             <a:avLst/>
           </a:prstGeom>
           <a:solidFill>
-            <a:srgbClr val="005587"/>
+            <a:srgbClr val="312E81"/>
           </a:solidFill>
           <a:ln>
             <a:noFill/>
@@ -37048,7 +36829,7 @@
             <a:avLst/>
           </a:prstGeom>
           <a:solidFill>
-            <a:srgbClr val="005587"/>
+            <a:srgbClr val="312E81"/>
           </a:solidFill>
           <a:ln>
             <a:noFill/>
@@ -37127,7 +36908,7 @@
             <a:avLst/>
           </a:prstGeom>
           <a:solidFill>
-            <a:srgbClr val="005587"/>
+            <a:srgbClr val="312E81"/>
           </a:solidFill>
           <a:ln>
             <a:noFill/>
@@ -37206,7 +36987,7 @@
             <a:avLst/>
           </a:prstGeom>
           <a:solidFill>
-            <a:srgbClr val="005587"/>
+            <a:srgbClr val="312E81"/>
           </a:solidFill>
           <a:ln>
             <a:noFill/>
@@ -37285,7 +37066,7 @@
             <a:avLst/>
           </a:prstGeom>
           <a:solidFill>
-            <a:srgbClr val="1C3D26"/>
+            <a:srgbClr val="172554"/>
           </a:solidFill>
           <a:ln>
             <a:noFill/>
@@ -37448,7 +37229,7 @@
             <a:avLst/>
           </a:prstGeom>
           <a:solidFill>
-            <a:srgbClr val="86BC25"/>
+            <a:srgbClr val="3B82F6"/>
           </a:solidFill>
           <a:ln>
             <a:noFill/>
@@ -37584,7 +37365,7 @@
             <a:r>
               <a:rPr sz="1000" b="1" i="0">
                 <a:solidFill>
-                  <a:srgbClr val="86BC25"/>
+                  <a:srgbClr val="3B82F6"/>
                 </a:solidFill>
                 <a:latin typeface="Aptos"/>
               </a:rPr>
@@ -37705,7 +37486,7 @@
             <a:avLst/>
           </a:prstGeom>
           <a:solidFill>
-            <a:srgbClr val="26890D"/>
+            <a:srgbClr val="1D4ED8"/>
           </a:solidFill>
           <a:ln>
             <a:noFill/>
@@ -37841,7 +37622,7 @@
             <a:r>
               <a:rPr sz="1000" b="1" i="0">
                 <a:solidFill>
-                  <a:srgbClr val="26890D"/>
+                  <a:srgbClr val="1D4ED8"/>
                 </a:solidFill>
                 <a:latin typeface="Aptos"/>
               </a:rPr>
@@ -37944,7 +37725,7 @@
             <a:avLst/>
           </a:prstGeom>
           <a:solidFill>
-            <a:srgbClr val="0D8390"/>
+            <a:srgbClr val="7C3AED"/>
           </a:solidFill>
           <a:ln>
             <a:noFill/>
@@ -38080,7 +37861,7 @@
             <a:r>
               <a:rPr sz="1000" b="1" i="0">
                 <a:solidFill>
-                  <a:srgbClr val="0D8390"/>
+                  <a:srgbClr val="7C3AED"/>
                 </a:solidFill>
                 <a:latin typeface="Aptos"/>
               </a:rPr>
@@ -38183,7 +37964,7 @@
             <a:avLst/>
           </a:prstGeom>
           <a:solidFill>
-            <a:srgbClr val="0076A8"/>
+            <a:srgbClr val="4C3AA8"/>
           </a:solidFill>
           <a:ln>
             <a:noFill/>
@@ -38319,7 +38100,7 @@
             <a:r>
               <a:rPr sz="1000" b="1" i="0">
                 <a:solidFill>
-                  <a:srgbClr val="0076A8"/>
+                  <a:srgbClr val="4C3AA8"/>
                 </a:solidFill>
                 <a:latin typeface="Aptos"/>
               </a:rPr>
@@ -38422,7 +38203,7 @@
             <a:avLst/>
           </a:prstGeom>
           <a:solidFill>
-            <a:srgbClr val="005587"/>
+            <a:srgbClr val="312E81"/>
           </a:solidFill>
           <a:ln>
             <a:noFill/>
@@ -38558,7 +38339,7 @@
             <a:r>
               <a:rPr sz="1000" b="1" i="0">
                 <a:solidFill>
-                  <a:srgbClr val="005587"/>
+                  <a:srgbClr val="312E81"/>
                 </a:solidFill>
                 <a:latin typeface="Aptos"/>
               </a:rPr>
@@ -39269,7 +39050,7 @@
             <a:avLst/>
           </a:prstGeom>
           <a:solidFill>
-            <a:srgbClr val="0D8390"/>
+            <a:srgbClr val="7C3AED"/>
           </a:solidFill>
           <a:ln>
             <a:noFill/>
@@ -39429,7 +39210,7 @@
             <a:avLst/>
           </a:prstGeom>
           <a:solidFill>
-            <a:srgbClr val="0D8390"/>
+            <a:srgbClr val="7C3AED"/>
           </a:solidFill>
           <a:ln>
             <a:noFill/>
@@ -39508,7 +39289,7 @@
             <a:avLst/>
           </a:prstGeom>
           <a:solidFill>
-            <a:srgbClr val="0D8390"/>
+            <a:srgbClr val="7C3AED"/>
           </a:solidFill>
           <a:ln>
             <a:noFill/>
@@ -39587,7 +39368,7 @@
             <a:avLst/>
           </a:prstGeom>
           <a:solidFill>
-            <a:srgbClr val="0D8390"/>
+            <a:srgbClr val="7C3AED"/>
           </a:solidFill>
           <a:ln>
             <a:noFill/>
@@ -39666,7 +39447,7 @@
             <a:avLst/>
           </a:prstGeom>
           <a:solidFill>
-            <a:srgbClr val="0D8390"/>
+            <a:srgbClr val="7C3AED"/>
           </a:solidFill>
           <a:ln>
             <a:noFill/>
@@ -39745,7 +39526,7 @@
             <a:avLst/>
           </a:prstGeom>
           <a:solidFill>
-            <a:srgbClr val="0D8390"/>
+            <a:srgbClr val="7C3AED"/>
           </a:solidFill>
           <a:ln>
             <a:noFill/>
@@ -39824,7 +39605,7 @@
             <a:avLst/>
           </a:prstGeom>
           <a:solidFill>
-            <a:srgbClr val="005587"/>
+            <a:srgbClr val="312E81"/>
           </a:solidFill>
           <a:ln>
             <a:noFill/>
@@ -39984,7 +39765,7 @@
             <a:avLst/>
           </a:prstGeom>
           <a:solidFill>
-            <a:srgbClr val="005587"/>
+            <a:srgbClr val="312E81"/>
           </a:solidFill>
           <a:ln>
             <a:noFill/>
@@ -40063,7 +39844,7 @@
             <a:avLst/>
           </a:prstGeom>
           <a:solidFill>
-            <a:srgbClr val="005587"/>
+            <a:srgbClr val="312E81"/>
           </a:solidFill>
           <a:ln>
             <a:noFill/>
@@ -40142,7 +39923,7 @@
             <a:avLst/>
           </a:prstGeom>
           <a:solidFill>
-            <a:srgbClr val="005587"/>
+            <a:srgbClr val="312E81"/>
           </a:solidFill>
           <a:ln>
             <a:noFill/>
@@ -40221,7 +40002,7 @@
             <a:avLst/>
           </a:prstGeom>
           <a:solidFill>
-            <a:srgbClr val="005587"/>
+            <a:srgbClr val="312E81"/>
           </a:solidFill>
           <a:ln>
             <a:noFill/>
@@ -40300,7 +40081,7 @@
             <a:avLst/>
           </a:prstGeom>
           <a:solidFill>
-            <a:srgbClr val="005587"/>
+            <a:srgbClr val="312E81"/>
           </a:solidFill>
           <a:ln>
             <a:noFill/>
@@ -40499,7 +40280,7 @@
             <a:avLst/>
           </a:prstGeom>
           <a:solidFill>
-            <a:srgbClr val="86BC25"/>
+            <a:srgbClr val="3B82F6"/>
           </a:solidFill>
           <a:ln>
             <a:noFill/>
@@ -40721,7 +40502,7 @@
             <a:avLst/>
           </a:prstGeom>
           <a:solidFill>
-            <a:srgbClr val="26890D"/>
+            <a:srgbClr val="1D4ED8"/>
           </a:solidFill>
           <a:ln>
             <a:noFill/>
@@ -40925,7 +40706,7 @@
             <a:avLst/>
           </a:prstGeom>
           <a:solidFill>
-            <a:srgbClr val="0D8390"/>
+            <a:srgbClr val="7C3AED"/>
           </a:solidFill>
           <a:ln>
             <a:noFill/>
@@ -41264,7 +41045,7 @@
             <a:avLst/>
           </a:prstGeom>
           <a:solidFill>
-            <a:srgbClr val="0076A8"/>
+            <a:srgbClr val="4C3AA8"/>
           </a:solidFill>
           <a:ln>
             <a:noFill/>
@@ -41612,7 +41393,7 @@
             <a:avLst/>
           </a:prstGeom>
           <a:solidFill>
-            <a:srgbClr val="005587"/>
+            <a:srgbClr val="312E81"/>
           </a:solidFill>
           <a:ln>
             <a:noFill/>
@@ -42079,7 +41860,7 @@
             <a:avLst/>
           </a:prstGeom>
           <a:solidFill>
-            <a:srgbClr val="86BC25"/>
+            <a:srgbClr val="3B82F6"/>
           </a:solidFill>
           <a:ln>
             <a:noFill/>
@@ -42202,7 +41983,7 @@
             <a:avLst/>
           </a:prstGeom>
           <a:solidFill>
-            <a:srgbClr val="86BC25"/>
+            <a:srgbClr val="3B82F6"/>
           </a:solidFill>
           <a:ln>
             <a:noFill/>
@@ -42316,7 +42097,7 @@
             <a:avLst/>
           </a:prstGeom>
           <a:solidFill>
-            <a:srgbClr val="26890D"/>
+            <a:srgbClr val="1D4ED8"/>
           </a:solidFill>
           <a:ln>
             <a:noFill/>
@@ -42439,7 +42220,7 @@
             <a:avLst/>
           </a:prstGeom>
           <a:solidFill>
-            <a:srgbClr val="26890D"/>
+            <a:srgbClr val="1D4ED8"/>
           </a:solidFill>
           <a:ln>
             <a:noFill/>
@@ -42553,7 +42334,7 @@
             <a:avLst/>
           </a:prstGeom>
           <a:solidFill>
-            <a:srgbClr val="0D8390"/>
+            <a:srgbClr val="7C3AED"/>
           </a:solidFill>
           <a:ln>
             <a:noFill/>
@@ -42676,7 +42457,7 @@
             <a:avLst/>
           </a:prstGeom>
           <a:solidFill>
-            <a:srgbClr val="0D8390"/>
+            <a:srgbClr val="7C3AED"/>
           </a:solidFill>
           <a:ln>
             <a:noFill/>
@@ -42790,7 +42571,7 @@
             <a:avLst/>
           </a:prstGeom>
           <a:solidFill>
-            <a:srgbClr val="0076A8"/>
+            <a:srgbClr val="4C3AA8"/>
           </a:solidFill>
           <a:ln>
             <a:noFill/>
@@ -42913,7 +42694,7 @@
             <a:avLst/>
           </a:prstGeom>
           <a:solidFill>
-            <a:srgbClr val="0076A8"/>
+            <a:srgbClr val="4C3AA8"/>
           </a:solidFill>
           <a:ln>
             <a:noFill/>
@@ -43027,7 +42808,7 @@
             <a:avLst/>
           </a:prstGeom>
           <a:solidFill>
-            <a:srgbClr val="005587"/>
+            <a:srgbClr val="312E81"/>
           </a:solidFill>
           <a:ln>
             <a:noFill/>
@@ -43150,7 +42931,7 @@
             <a:avLst/>
           </a:prstGeom>
           <a:solidFill>
-            <a:srgbClr val="005587"/>
+            <a:srgbClr val="312E81"/>
           </a:solidFill>
           <a:ln>
             <a:noFill/>
@@ -43264,7 +43045,7 @@
             <a:avLst/>
           </a:prstGeom>
           <a:solidFill>
-            <a:srgbClr val="007680"/>
+            <a:srgbClr val="5B21B6"/>
           </a:solidFill>
           <a:ln>
             <a:noFill/>
@@ -43387,7 +43168,7 @@
             <a:avLst/>
           </a:prstGeom>
           <a:solidFill>
-            <a:srgbClr val="007680"/>
+            <a:srgbClr val="5B21B6"/>
           </a:solidFill>
           <a:ln>
             <a:noFill/>
@@ -43656,7 +43437,7 @@
             <a:avLst/>
           </a:prstGeom>
           <a:solidFill>
-            <a:srgbClr val="86BC25"/>
+            <a:srgbClr val="3B82F6"/>
           </a:solidFill>
           <a:ln>
             <a:noFill/>
@@ -43719,7 +43500,7 @@
             <a:r>
               <a:rPr sz="1100" b="1" i="0">
                 <a:solidFill>
-                  <a:srgbClr val="86BC25"/>
+                  <a:srgbClr val="3B82F6"/>
                 </a:solidFill>
                 <a:latin typeface="Aptos"/>
               </a:rPr>
@@ -43827,7 +43608,7 @@
             <a:avLst/>
           </a:prstGeom>
           <a:solidFill>
-            <a:srgbClr val="26890D"/>
+            <a:srgbClr val="1D4ED8"/>
           </a:solidFill>
           <a:ln>
             <a:noFill/>
@@ -43890,7 +43671,7 @@
             <a:r>
               <a:rPr sz="1100" b="1" i="0">
                 <a:solidFill>
-                  <a:srgbClr val="26890D"/>
+                  <a:srgbClr val="1D4ED8"/>
                 </a:solidFill>
                 <a:latin typeface="Aptos"/>
               </a:rPr>
@@ -43998,7 +43779,7 @@
             <a:avLst/>
           </a:prstGeom>
           <a:solidFill>
-            <a:srgbClr val="0D8390"/>
+            <a:srgbClr val="7C3AED"/>
           </a:solidFill>
           <a:ln>
             <a:noFill/>
@@ -44061,7 +43842,7 @@
             <a:r>
               <a:rPr sz="1100" b="1" i="0">
                 <a:solidFill>
-                  <a:srgbClr val="0D8390"/>
+                  <a:srgbClr val="7C3AED"/>
                 </a:solidFill>
                 <a:latin typeface="Aptos"/>
               </a:rPr>
@@ -44169,7 +43950,7 @@
             <a:avLst/>
           </a:prstGeom>
           <a:solidFill>
-            <a:srgbClr val="0076A8"/>
+            <a:srgbClr val="4C3AA8"/>
           </a:solidFill>
           <a:ln>
             <a:noFill/>
@@ -44232,7 +44013,7 @@
             <a:r>
               <a:rPr sz="1100" b="1" i="0">
                 <a:solidFill>
-                  <a:srgbClr val="0076A8"/>
+                  <a:srgbClr val="4C3AA8"/>
                 </a:solidFill>
                 <a:latin typeface="Aptos"/>
               </a:rPr>
@@ -44340,7 +44121,7 @@
             <a:avLst/>
           </a:prstGeom>
           <a:solidFill>
-            <a:srgbClr val="005587"/>
+            <a:srgbClr val="312E81"/>
           </a:solidFill>
           <a:ln>
             <a:noFill/>
@@ -44403,7 +44184,7 @@
             <a:r>
               <a:rPr sz="1100" b="1" i="0">
                 <a:solidFill>
-                  <a:srgbClr val="005587"/>
+                  <a:srgbClr val="312E81"/>
                 </a:solidFill>
                 <a:latin typeface="Aptos"/>
               </a:rPr>
@@ -44682,7 +44463,7 @@
             <a:avLst/>
           </a:prstGeom>
           <a:solidFill>
-            <a:srgbClr val="1C3D26"/>
+            <a:srgbClr val="172554"/>
           </a:solidFill>
           <a:ln>
             <a:noFill/>
@@ -44939,7 +44720,7 @@
             <a:avLst/>
           </a:prstGeom>
           <a:solidFill>
-            <a:srgbClr val="86BC25"/>
+            <a:srgbClr val="3B82F6"/>
           </a:solidFill>
           <a:ln>
             <a:noFill/>
@@ -45065,7 +44846,7 @@
             <a:avLst/>
           </a:prstGeom>
           <a:solidFill>
-            <a:srgbClr val="86BC25"/>
+            <a:srgbClr val="3B82F6"/>
           </a:solidFill>
           <a:ln>
             <a:noFill/>
@@ -45144,7 +44925,7 @@
             <a:avLst/>
           </a:prstGeom>
           <a:solidFill>
-            <a:srgbClr val="86BC25"/>
+            <a:srgbClr val="3B82F6"/>
           </a:solidFill>
           <a:ln>
             <a:noFill/>
@@ -45250,7 +45031,7 @@
             <a:avLst/>
           </a:prstGeom>
           <a:solidFill>
-            <a:srgbClr val="86BC25"/>
+            <a:srgbClr val="3B82F6"/>
           </a:solidFill>
           <a:ln>
             <a:noFill/>
@@ -45329,7 +45110,7 @@
             <a:avLst/>
           </a:prstGeom>
           <a:solidFill>
-            <a:srgbClr val="0D8390"/>
+            <a:srgbClr val="7C3AED"/>
           </a:solidFill>
           <a:ln>
             <a:noFill/>
@@ -45455,7 +45236,7 @@
             <a:avLst/>
           </a:prstGeom>
           <a:solidFill>
-            <a:srgbClr val="0D8390"/>
+            <a:srgbClr val="7C3AED"/>
           </a:solidFill>
           <a:ln>
             <a:noFill/>
@@ -45534,7 +45315,7 @@
             <a:avLst/>
           </a:prstGeom>
           <a:solidFill>
-            <a:srgbClr val="0D8390"/>
+            <a:srgbClr val="7C3AED"/>
           </a:solidFill>
           <a:ln>
             <a:noFill/>
@@ -45613,7 +45394,7 @@
             <a:avLst/>
           </a:prstGeom>
           <a:solidFill>
-            <a:srgbClr val="0D8390"/>
+            <a:srgbClr val="7C3AED"/>
           </a:solidFill>
           <a:ln>
             <a:noFill/>
@@ -45692,7 +45473,7 @@
             <a:avLst/>
           </a:prstGeom>
           <a:solidFill>
-            <a:srgbClr val="26890D"/>
+            <a:srgbClr val="1D4ED8"/>
           </a:solidFill>
           <a:ln>
             <a:noFill/>
@@ -45818,7 +45599,7 @@
             <a:avLst/>
           </a:prstGeom>
           <a:solidFill>
-            <a:srgbClr val="26890D"/>
+            <a:srgbClr val="1D4ED8"/>
           </a:solidFill>
           <a:ln>
             <a:noFill/>
@@ -45897,7 +45678,7 @@
             <a:avLst/>
           </a:prstGeom>
           <a:solidFill>
-            <a:srgbClr val="26890D"/>
+            <a:srgbClr val="1D4ED8"/>
           </a:solidFill>
           <a:ln>
             <a:noFill/>
@@ -45976,7 +45757,7 @@
             <a:avLst/>
           </a:prstGeom>
           <a:solidFill>
-            <a:srgbClr val="26890D"/>
+            <a:srgbClr val="1D4ED8"/>
           </a:solidFill>
           <a:ln>
             <a:noFill/>
@@ -46055,7 +45836,7 @@
             <a:avLst/>
           </a:prstGeom>
           <a:solidFill>
-            <a:srgbClr val="005587"/>
+            <a:srgbClr val="312E81"/>
           </a:solidFill>
           <a:ln>
             <a:noFill/>
@@ -46181,7 +45962,7 @@
             <a:avLst/>
           </a:prstGeom>
           <a:solidFill>
-            <a:srgbClr val="005587"/>
+            <a:srgbClr val="312E81"/>
           </a:solidFill>
           <a:ln>
             <a:noFill/>
@@ -46260,7 +46041,7 @@
             <a:avLst/>
           </a:prstGeom>
           <a:solidFill>
-            <a:srgbClr val="005587"/>
+            <a:srgbClr val="312E81"/>
           </a:solidFill>
           <a:ln>
             <a:noFill/>
@@ -46339,7 +46120,7 @@
             <a:avLst/>
           </a:prstGeom>
           <a:solidFill>
-            <a:srgbClr val="005587"/>
+            <a:srgbClr val="312E81"/>
           </a:solidFill>
           <a:ln>
             <a:noFill/>
@@ -46418,7 +46199,7 @@
             <a:avLst/>
           </a:prstGeom>
           <a:solidFill>
-            <a:srgbClr val="86BC25"/>
+            <a:srgbClr val="3B82F6"/>
           </a:solidFill>
           <a:ln>
             <a:noFill/>
@@ -46497,7 +46278,7 @@
             <a:avLst/>
           </a:prstGeom>
           <a:solidFill>
-            <a:srgbClr val="86BC25"/>
+            <a:srgbClr val="3B82F6"/>
           </a:solidFill>
           <a:ln>
             <a:noFill/>
@@ -46623,7 +46404,7 @@
             <a:avLst/>
           </a:prstGeom>
           <a:solidFill>
-            <a:srgbClr val="86BC25"/>
+            <a:srgbClr val="3B82F6"/>
           </a:solidFill>
           <a:ln>
             <a:noFill/>
@@ -46702,7 +46483,7 @@
             <a:avLst/>
           </a:prstGeom>
           <a:solidFill>
-            <a:srgbClr val="86BC25"/>
+            <a:srgbClr val="3B82F6"/>
           </a:solidFill>
           <a:ln>
             <a:noFill/>
@@ -46781,7 +46562,7 @@
             <a:avLst/>
           </a:prstGeom>
           <a:solidFill>
-            <a:srgbClr val="86BC25"/>
+            <a:srgbClr val="3B82F6"/>
           </a:solidFill>
           <a:ln>
             <a:noFill/>
@@ -46860,7 +46641,7 @@
             <a:avLst/>
           </a:prstGeom>
           <a:solidFill>
-            <a:srgbClr val="0D8390"/>
+            <a:srgbClr val="7C3AED"/>
           </a:solidFill>
           <a:ln>
             <a:noFill/>
@@ -46986,7 +46767,7 @@
             <a:avLst/>
           </a:prstGeom>
           <a:solidFill>
-            <a:srgbClr val="0D8390"/>
+            <a:srgbClr val="7C3AED"/>
           </a:solidFill>
           <a:ln>
             <a:noFill/>
@@ -47065,7 +46846,7 @@
             <a:avLst/>
           </a:prstGeom>
           <a:solidFill>
-            <a:srgbClr val="0D8390"/>
+            <a:srgbClr val="7C3AED"/>
           </a:solidFill>
           <a:ln>
             <a:noFill/>
@@ -47144,7 +46925,7 @@
             <a:avLst/>
           </a:prstGeom>
           <a:solidFill>
-            <a:srgbClr val="0D8390"/>
+            <a:srgbClr val="7C3AED"/>
           </a:solidFill>
           <a:ln>
             <a:noFill/>
@@ -47223,7 +47004,7 @@
             <a:avLst/>
           </a:prstGeom>
           <a:solidFill>
-            <a:srgbClr val="005587"/>
+            <a:srgbClr val="312E81"/>
           </a:solidFill>
           <a:ln>
             <a:noFill/>
@@ -47349,7 +47130,7 @@
             <a:avLst/>
           </a:prstGeom>
           <a:solidFill>
-            <a:srgbClr val="005587"/>
+            <a:srgbClr val="312E81"/>
           </a:solidFill>
           <a:ln>
             <a:noFill/>
@@ -47428,7 +47209,7 @@
             <a:avLst/>
           </a:prstGeom>
           <a:solidFill>
-            <a:srgbClr val="005587"/>
+            <a:srgbClr val="312E81"/>
           </a:solidFill>
           <a:ln>
             <a:noFill/>
@@ -47507,7 +47288,7 @@
             <a:avLst/>
           </a:prstGeom>
           <a:solidFill>
-            <a:srgbClr val="005587"/>
+            <a:srgbClr val="312E81"/>
           </a:solidFill>
           <a:ln>
             <a:noFill/>
@@ -47675,12 +47456,6 @@
 </file>
 
 <file path=ppt/tags/tag19.xml><?xml version="1.0" encoding="utf-8"?>
-<p:tagLst xmlns:a="http://schemas.openxmlformats.org/drawingml/2006/main" xmlns:r="http://schemas.openxmlformats.org/officeDocument/2006/relationships" xmlns:p="http://schemas.openxmlformats.org/presentationml/2006/main">
-  <p:tag name="THINKCELLSHAPEDONOTDELETE" val="thinkcellActiveDocDoNotDelete"/>
-</p:tagLst>
-</file>
-
-<file path=ppt/tags/tag2.xml><?xml version="1.0" encoding="utf-8"?>
 <p:tagLst xmlns:a="http://schemas.openxmlformats.org/drawingml/2006/main" xmlns:r="http://schemas.openxmlformats.org/officeDocument/2006/relationships" xmlns:p="http://schemas.openxmlformats.org/presentationml/2006/main">
   <p:tag name="THINKCELLSHAPEDONOTDELETE" val="thinkcellActiveDocDoNotDelete"/>
 </p:tagLst>
@@ -47825,7 +47600,7 @@
 </file>
 
 <file path=ppt/theme/theme1.xml><?xml version="1.0" encoding="utf-8"?>
-<a:theme xmlns:a="http://schemas.openxmlformats.org/drawingml/2006/main" name="Deloitte_Brand_Theme">
+<a:theme xmlns:a="http://schemas.openxmlformats.org/drawingml/2006/main" name="Custom_Brand_Theme">
   <a:themeElements>
     <a:clrScheme name="Custom 1">
       <a:dk1>
@@ -47841,25 +47616,25 @@
         <a:srgbClr val="E6E6E6"/>
       </a:lt2>
       <a:accent1>
-        <a:srgbClr val="86BC25"/>
+        <a:srgbClr val="3B82F6"/>
       </a:accent1>
       <a:accent2>
-        <a:srgbClr val="26890D"/>
+        <a:srgbClr val="1D4ED8"/>
       </a:accent2>
       <a:accent3>
-        <a:srgbClr val="046A38"/>
+        <a:srgbClr val="1E3A8A"/>
       </a:accent3>
       <a:accent4>
-        <a:srgbClr val="1C3D26"/>
+        <a:srgbClr val="172554"/>
       </a:accent4>
       <a:accent5>
-        <a:srgbClr val="0DF200"/>
+        <a:srgbClr val="38BDF8"/>
       </a:accent5>
       <a:accent6>
-        <a:srgbClr val="F1F6E4"/>
+        <a:srgbClr val="EAF1FE"/>
       </a:accent6>
       <a:hlink>
-        <a:srgbClr val="26890D"/>
+        <a:srgbClr val="1D4ED8"/>
       </a:hlink>
       <a:folHlink>
         <a:srgbClr val="7F7F7F"/>
@@ -48123,107 +47898,10 @@
     </a:txDef>
   </a:objectDefaults>
   <a:extraClrSchemeLst/>
-  <a:custClrLst>
-    <a:custClr name="Green 5">
-      <a:srgbClr val="009A44"/>
-    </a:custClr>
-    <a:custClr name="Green 4">
-      <a:srgbClr val="43B02A"/>
-    </a:custClr>
-    <a:custClr name="Green 2">
-      <a:srgbClr val="C4D600"/>
-    </a:custClr>
-    <a:custClr name="Green 1">
-      <a:srgbClr val="E3E48D"/>
-    </a:custClr>
-    <a:custClr name="Teal 8">
-      <a:srgbClr val="0D8390"/>
-    </a:custClr>
-    <a:custClr name="Teal 7">
-      <a:srgbClr val="004F59"/>
-    </a:custClr>
-    <a:custClr name="Teal 6">
-      <a:srgbClr val="007680"/>
-    </a:custClr>
-    <a:custClr name="Teal 5">
-      <a:srgbClr val="0097A9"/>
-    </a:custClr>
-    <a:custClr name="Teal 4">
-      <a:srgbClr val="00ABAB"/>
-    </a:custClr>
-    <a:custClr name="Teal 3">
-      <a:srgbClr val="6FC2B4"/>
-    </a:custClr>
-    <a:custClr name="Teal 2">
-      <a:srgbClr val="9DD4CF"/>
-    </a:custClr>
-    <a:custClr name="Teal 1">
-      <a:srgbClr val="DDEFE8"/>
-    </a:custClr>
-    <a:custClr name="Blue 8">
-      <a:srgbClr val="007CB0"/>
-    </a:custClr>
-    <a:custClr name="Blue 7">
-      <a:srgbClr val="041E42"/>
-    </a:custClr>
-    <a:custClr name="Blue 6">
-      <a:srgbClr val="012169"/>
-    </a:custClr>
-    <a:custClr name="Blue 5">
-      <a:srgbClr val="005587"/>
-    </a:custClr>
-    <a:custClr name="Blue 4">
-      <a:srgbClr val="0076A8"/>
-    </a:custClr>
-    <a:custClr name="Blue 3">
-      <a:srgbClr val="00A3E0"/>
-    </a:custClr>
-    <a:custClr name="Blue 2">
-      <a:srgbClr val="62B5E5"/>
-    </a:custClr>
-    <a:custClr name="Blue 1">
-      <a:srgbClr val="A0DCFF"/>
-    </a:custClr>
-    <a:custClr name="Cool Gray 11">
-      <a:srgbClr val="53565A"/>
-    </a:custClr>
-    <a:custClr name="Cool Gray 10">
-      <a:srgbClr val="63666A"/>
-    </a:custClr>
-    <a:custClr name="Cool Gray 9">
-      <a:srgbClr val="75787B"/>
-    </a:custClr>
-    <a:custClr name="Cool Gray 7">
-      <a:srgbClr val="97999B"/>
-    </a:custClr>
-    <a:custClr name="Cool Gray 6">
-      <a:srgbClr val="A7A8AA"/>
-    </a:custClr>
-    <a:custClr name="Cool Gray 4">
-      <a:srgbClr val="BBBCBC"/>
-    </a:custClr>
-    <a:custClr name="Cool Gray 2">
-      <a:srgbClr val="D0D0CE"/>
-    </a:custClr>
-    <a:custClr name="Bright Teal">
-      <a:srgbClr val="3EFAC5"/>
-    </a:custClr>
-    <a:custClr name="Bright Blue">
-      <a:srgbClr val="33F0FF"/>
-    </a:custClr>
-    <a:custClr name="Red">
-      <a:srgbClr val="DA291C"/>
-    </a:custClr>
-    <a:custClr name="Orange">
-      <a:srgbClr val="ED8B00"/>
-    </a:custClr>
-    <a:custClr name="Yellow">
-      <a:srgbClr val="FFCD00"/>
-    </a:custClr>
-  </a:custClrLst>
+  <a:custClrLst/>
   <a:extLst>
     <a:ext uri="{05A4C25C-085E-4340-85A3-A5531E510DB2}">
-      <thm15:themeFamily xmlns:thm15="http://schemas.microsoft.com/office/thememl/2012/main" name="Deloitte_Brand_Theme" id="{917CC780-C041-4F84-B057-DE63A8CDEF25}" vid="{5A16EDA9-025E-49B0-B403-896FAE83D19A}"/>
+      <thm15:themeFamily xmlns:thm15="http://schemas.microsoft.com/office/thememl/2012/main" name="Custom_Brand_Theme" id="{917CC780-C041-4F84-B057-DE63A8CDEF25}" vid="{5A16EDA9-025E-49B0-B403-896FAE83D19A}"/>
     </a:ext>
   </a:extLst>
 </a:theme>
@@ -49086,7 +48764,5 @@
 </file>
 
 <file path=docMetadata/LabelInfo.xml><?xml version="1.0" encoding="utf-8"?>
-<clbl:labelList xmlns:clbl="http://schemas.microsoft.com/office/2020/mipLabelMetadata">
-  <clbl:label id="{ea60d57e-af5b-4752-ac57-3e4f28ca11dc}" enabled="1" method="Standard" siteId="{36da45f1-dd2c-4d1f-af13-5abe46b99921}" removed="0"/>
-</clbl:labelList>
+<clbl:labelList xmlns:clbl="http://schemas.microsoft.com/office/2020/mipLabelMetadata"/>
 </file>